--- a/docs/RummiArena_기획설계검토.pptx
+++ b/docs/RummiArena_기획설계검토.pptx
@@ -11383,7 +11383,7 @@
               <a:t>Docker Desktop K8s
 Helm 3
 ArgoCD
-NGINX Ingress</a:t>
+Traefik Ingress</a:t>
             </a:r>
           </a:p>
         </p:txBody>
@@ -25958,7 +25958,7 @@
                   <a:srgbClr val="CCCCCC"/>
                 </a:solidFill>
               </a:rPr>
-              <a:t>Ingress (NGINX)</a:t>
+              <a:t>Ingress (Traefik)</a:t>
             </a:r>
           </a:p>
         </p:txBody>
@@ -26018,9 +26018,8 @@
                   <a:srgbClr val="FFFFFF"/>
                 </a:solidFill>
               </a:rPr>
-              <a:t>NGINX
-Ingress
-Controller
+              <a:t>Traefik
+Proxy
 TLS 종단
 라우팅</a:t>
             </a:r>
@@ -32540,7 +32539,7 @@
                   <a:srgbClr val="CCCCCC"/>
                 </a:solidFill>
               </a:rPr>
-              <a:t>NGINX Ingress Controller  (TLS Termination, self-signed cert)</a:t>
+              <a:t>Traefik Proxy  (TLS Termination, self-signed cert)</a:t>
             </a:r>
           </a:p>
         </p:txBody>
